--- a/low-tech/deck-building.pptx
+++ b/low-tech/deck-building.pptx
@@ -4672,7 +4672,7 @@
                 </a:solidFill>
                 <a:latin typeface="Calibri"/>
               </a:rPr>
-              <a:t>From Evidence Grid to Investor Deck</a:t>
+              <a:t>From Narrative to Investor Deck</a:t>
             </a:r>
           </a:p>
         </p:txBody>

--- a/low-tech/deck-building.pptx
+++ b/low-tech/deck-building.pptx
@@ -4912,6 +4912,70 @@
           </a:p>
         </p:txBody>
       </p:sp>
+      <p:sp>
+        <p:nvSpPr>
+          <p:cNvPr id="4" name="TextBox 3"/>
+          <p:cNvSpPr txBox="1"/>
+          <p:nvPr/>
+        </p:nvSpPr>
+        <p:spPr>
+          <a:xfrm>
+            <a:off x="457200" y="5029200"/>
+            <a:ext cx="8229600" cy="1645920"/>
+          </a:xfrm>
+          <a:prstGeom prst="rect">
+            <a:avLst/>
+          </a:prstGeom>
+          <a:solidFill>
+            <a:srgbClr val="FFF7ED"/>
+          </a:solidFill>
+          <a:ln w="12700">
+            <a:solidFill>
+              <a:srgbClr val="EA580D"/>
+            </a:solidFill>
+          </a:ln>
+        </p:spPr>
+        <p:txBody>
+          <a:bodyPr wrap="square">
+            <a:spAutoFit/>
+          </a:bodyPr>
+          <a:lstStyle/>
+          <a:p>
+            <a:r>
+              <a:rPr sz="800" b="1">
+                <a:solidFill>
+                  <a:srgbClr val="EA580D"/>
+                </a:solidFill>
+              </a:rPr>
+              <a:t>AI COACH PROMPT</a:t>
+            </a:r>
+          </a:p>
+          <a:p>
+            <a:r>
+              <a:rPr sz="700">
+                <a:solidFill>
+                  <a:srgbClr val="64748B"/>
+                </a:solidFill>
+              </a:rPr>
+              <a:t>Copy the text below and paste it into ChatGPT, Claude, or any AI tool:</a:t>
+            </a:r>
+          </a:p>
+          <a:p>
+            <a:r>
+              <a:rPr sz="700" i="1">
+                <a:solidFill>
+                  <a:srgbClr val="0F172A"/>
+                </a:solidFill>
+              </a:rPr>
+              <a:t>I am building [describe your startup]. I am working on the The Vision slide of my pitch deck. Here is my current draft:
+Key Narrative: [paste yours]
+Proof Points: [paste yours]
+So What?: [paste yours]
+Help me sharpen this. Challenge weak claims, suggest stronger evidence, and rewrite the narrative to be more compelling. Keep it concise. Invest...</a:t>
+            </a:r>
+          </a:p>
+        </p:txBody>
+      </p:sp>
     </p:spTree>
   </p:cSld>
   <p:clrMapOvr>
@@ -5147,6 +5211,70 @@
           </a:p>
         </p:txBody>
       </p:sp>
+      <p:sp>
+        <p:nvSpPr>
+          <p:cNvPr id="4" name="TextBox 3"/>
+          <p:cNvSpPr txBox="1"/>
+          <p:nvPr/>
+        </p:nvSpPr>
+        <p:spPr>
+          <a:xfrm>
+            <a:off x="457200" y="5029200"/>
+            <a:ext cx="8229600" cy="1645920"/>
+          </a:xfrm>
+          <a:prstGeom prst="rect">
+            <a:avLst/>
+          </a:prstGeom>
+          <a:solidFill>
+            <a:srgbClr val="FFF7ED"/>
+          </a:solidFill>
+          <a:ln w="12700">
+            <a:solidFill>
+              <a:srgbClr val="EA580D"/>
+            </a:solidFill>
+          </a:ln>
+        </p:spPr>
+        <p:txBody>
+          <a:bodyPr wrap="square">
+            <a:spAutoFit/>
+          </a:bodyPr>
+          <a:lstStyle/>
+          <a:p>
+            <a:r>
+              <a:rPr sz="800" b="1">
+                <a:solidFill>
+                  <a:srgbClr val="EA580D"/>
+                </a:solidFill>
+              </a:rPr>
+              <a:t>AI COACH PROMPT</a:t>
+            </a:r>
+          </a:p>
+          <a:p>
+            <a:r>
+              <a:rPr sz="700">
+                <a:solidFill>
+                  <a:srgbClr val="64748B"/>
+                </a:solidFill>
+              </a:rPr>
+              <a:t>Copy the text below and paste it into ChatGPT, Claude, or any AI tool:</a:t>
+            </a:r>
+          </a:p>
+          <a:p>
+            <a:r>
+              <a:rPr sz="700" i="1">
+                <a:solidFill>
+                  <a:srgbClr val="0F172A"/>
+                </a:solidFill>
+              </a:rPr>
+              <a:t>I am building [describe your startup]. I am working on the The Ask slide of my pitch deck. Here is my current draft:
+Key Narrative: [paste yours]
+Proof Points: [paste yours]
+So What?: [paste yours]
+Help me sharpen this. Challenge weak claims, suggest stronger evidence, and rewrite the narrative to be more compelling. Keep it concise. Investors...</a:t>
+            </a:r>
+          </a:p>
+        </p:txBody>
+      </p:sp>
     </p:spTree>
   </p:cSld>
   <p:clrMapOvr>
@@ -5361,6 +5489,70 @@
           </a:p>
         </p:txBody>
       </p:sp>
+      <p:sp>
+        <p:nvSpPr>
+          <p:cNvPr id="4" name="TextBox 3"/>
+          <p:cNvSpPr txBox="1"/>
+          <p:nvPr/>
+        </p:nvSpPr>
+        <p:spPr>
+          <a:xfrm>
+            <a:off x="457200" y="5029200"/>
+            <a:ext cx="8229600" cy="1645920"/>
+          </a:xfrm>
+          <a:prstGeom prst="rect">
+            <a:avLst/>
+          </a:prstGeom>
+          <a:solidFill>
+            <a:srgbClr val="FFF7ED"/>
+          </a:solidFill>
+          <a:ln w="12700">
+            <a:solidFill>
+              <a:srgbClr val="EA580D"/>
+            </a:solidFill>
+          </a:ln>
+        </p:spPr>
+        <p:txBody>
+          <a:bodyPr wrap="square">
+            <a:spAutoFit/>
+          </a:bodyPr>
+          <a:lstStyle/>
+          <a:p>
+            <a:r>
+              <a:rPr sz="800" b="1">
+                <a:solidFill>
+                  <a:srgbClr val="EA580D"/>
+                </a:solidFill>
+              </a:rPr>
+              <a:t>AI COACH PROMPT</a:t>
+            </a:r>
+          </a:p>
+          <a:p>
+            <a:r>
+              <a:rPr sz="700">
+                <a:solidFill>
+                  <a:srgbClr val="64748B"/>
+                </a:solidFill>
+              </a:rPr>
+              <a:t>Copy the text below and paste it into ChatGPT, Claude, or any AI tool:</a:t>
+            </a:r>
+          </a:p>
+          <a:p>
+            <a:r>
+              <a:rPr sz="700" i="1">
+                <a:solidFill>
+                  <a:srgbClr val="0F172A"/>
+                </a:solidFill>
+              </a:rPr>
+              <a:t>I am building [describe your startup]. I am working on the deck versions slide of my pitch deck. Here is my current draft:
+Key Narrative: [paste yours]
+Proof Points: [paste yours]
+So What?: [paste yours]
+Help me sharpen this. Challenge weak claims, suggest stronger evidence, and rewrite the narrative to be more compelling. Keep it concise. Inv...</a:t>
+            </a:r>
+          </a:p>
+        </p:txBody>
+      </p:sp>
     </p:spTree>
   </p:cSld>
   <p:clrMapOvr>
@@ -5701,6 +5893,70 @@
           </a:p>
         </p:txBody>
       </p:sp>
+      <p:sp>
+        <p:nvSpPr>
+          <p:cNvPr id="4" name="TextBox 3"/>
+          <p:cNvSpPr txBox="1"/>
+          <p:nvPr/>
+        </p:nvSpPr>
+        <p:spPr>
+          <a:xfrm>
+            <a:off x="457200" y="5029200"/>
+            <a:ext cx="8229600" cy="1645920"/>
+          </a:xfrm>
+          <a:prstGeom prst="rect">
+            <a:avLst/>
+          </a:prstGeom>
+          <a:solidFill>
+            <a:srgbClr val="FFF7ED"/>
+          </a:solidFill>
+          <a:ln w="12700">
+            <a:solidFill>
+              <a:srgbClr val="EA580D"/>
+            </a:solidFill>
+          </a:ln>
+        </p:spPr>
+        <p:txBody>
+          <a:bodyPr wrap="square">
+            <a:spAutoFit/>
+          </a:bodyPr>
+          <a:lstStyle/>
+          <a:p>
+            <a:r>
+              <a:rPr sz="800" b="1">
+                <a:solidFill>
+                  <a:srgbClr val="EA580D"/>
+                </a:solidFill>
+              </a:rPr>
+              <a:t>AI COACH PROMPT</a:t>
+            </a:r>
+          </a:p>
+          <a:p>
+            <a:r>
+              <a:rPr sz="700">
+                <a:solidFill>
+                  <a:srgbClr val="64748B"/>
+                </a:solidFill>
+              </a:rPr>
+              <a:t>Copy the text below and paste it into ChatGPT, Claude, or any AI tool:</a:t>
+            </a:r>
+          </a:p>
+          <a:p>
+            <a:r>
+              <a:rPr sz="700" i="1">
+                <a:solidFill>
+                  <a:srgbClr val="0F172A"/>
+                </a:solidFill>
+              </a:rPr>
+              <a:t>I am building [describe your startup]. I am working on the forwardable email slide of my pitch deck. Here is my current draft:
+Key Narrative: [paste yours]
+Proof Points: [paste yours]
+So What?: [paste yours]
+Help me sharpen this. Challenge weak claims, suggest stronger evidence, and rewrite the narrative to be more compelling. Keep it concise....</a:t>
+            </a:r>
+          </a:p>
+        </p:txBody>
+      </p:sp>
     </p:spTree>
   </p:cSld>
   <p:clrMapOvr>
@@ -5936,6 +6192,70 @@
           </a:p>
         </p:txBody>
       </p:sp>
+      <p:sp>
+        <p:nvSpPr>
+          <p:cNvPr id="4" name="TextBox 3"/>
+          <p:cNvSpPr txBox="1"/>
+          <p:nvPr/>
+        </p:nvSpPr>
+        <p:spPr>
+          <a:xfrm>
+            <a:off x="457200" y="5029200"/>
+            <a:ext cx="8229600" cy="1645920"/>
+          </a:xfrm>
+          <a:prstGeom prst="rect">
+            <a:avLst/>
+          </a:prstGeom>
+          <a:solidFill>
+            <a:srgbClr val="FFF7ED"/>
+          </a:solidFill>
+          <a:ln w="12700">
+            <a:solidFill>
+              <a:srgbClr val="EA580D"/>
+            </a:solidFill>
+          </a:ln>
+        </p:spPr>
+        <p:txBody>
+          <a:bodyPr wrap="square">
+            <a:spAutoFit/>
+          </a:bodyPr>
+          <a:lstStyle/>
+          <a:p>
+            <a:r>
+              <a:rPr sz="800" b="1">
+                <a:solidFill>
+                  <a:srgbClr val="EA580D"/>
+                </a:solidFill>
+              </a:rPr>
+              <a:t>AI COACH PROMPT</a:t>
+            </a:r>
+          </a:p>
+          <a:p>
+            <a:r>
+              <a:rPr sz="700">
+                <a:solidFill>
+                  <a:srgbClr val="64748B"/>
+                </a:solidFill>
+              </a:rPr>
+              <a:t>Copy the text below and paste it into ChatGPT, Claude, or any AI tool:</a:t>
+            </a:r>
+          </a:p>
+          <a:p>
+            <a:r>
+              <a:rPr sz="700" i="1">
+                <a:solidFill>
+                  <a:srgbClr val="0F172A"/>
+                </a:solidFill>
+              </a:rPr>
+              <a:t>I am building [describe your startup]. I am working on the The Hook slide of my pitch deck. Here is my current draft:
+Key Narrative: [paste yours]
+Proof Points: [paste yours]
+So What?: [paste yours]
+Help me sharpen this. Challenge weak claims, suggest stronger evidence, and rewrite the narrative to be more compelling. Keep it concise. Investor...</a:t>
+            </a:r>
+          </a:p>
+        </p:txBody>
+      </p:sp>
     </p:spTree>
   </p:cSld>
   <p:clrMapOvr>
@@ -6171,6 +6491,70 @@
           </a:p>
         </p:txBody>
       </p:sp>
+      <p:sp>
+        <p:nvSpPr>
+          <p:cNvPr id="4" name="TextBox 3"/>
+          <p:cNvSpPr txBox="1"/>
+          <p:nvPr/>
+        </p:nvSpPr>
+        <p:spPr>
+          <a:xfrm>
+            <a:off x="457200" y="5029200"/>
+            <a:ext cx="8229600" cy="1645920"/>
+          </a:xfrm>
+          <a:prstGeom prst="rect">
+            <a:avLst/>
+          </a:prstGeom>
+          <a:solidFill>
+            <a:srgbClr val="FFF7ED"/>
+          </a:solidFill>
+          <a:ln w="12700">
+            <a:solidFill>
+              <a:srgbClr val="EA580D"/>
+            </a:solidFill>
+          </a:ln>
+        </p:spPr>
+        <p:txBody>
+          <a:bodyPr wrap="square">
+            <a:spAutoFit/>
+          </a:bodyPr>
+          <a:lstStyle/>
+          <a:p>
+            <a:r>
+              <a:rPr sz="800" b="1">
+                <a:solidFill>
+                  <a:srgbClr val="EA580D"/>
+                </a:solidFill>
+              </a:rPr>
+              <a:t>AI COACH PROMPT</a:t>
+            </a:r>
+          </a:p>
+          <a:p>
+            <a:r>
+              <a:rPr sz="700">
+                <a:solidFill>
+                  <a:srgbClr val="64748B"/>
+                </a:solidFill>
+              </a:rPr>
+              <a:t>Copy the text below and paste it into ChatGPT, Claude, or any AI tool:</a:t>
+            </a:r>
+          </a:p>
+          <a:p>
+            <a:r>
+              <a:rPr sz="700" i="1">
+                <a:solidFill>
+                  <a:srgbClr val="0F172A"/>
+                </a:solidFill>
+              </a:rPr>
+              <a:t>I am building [describe your startup]. I am working on the The Problem slide of my pitch deck. Here is my current draft:
+Key Narrative: [paste yours]
+Proof Points: [paste yours]
+So What?: [paste yours]
+Help me sharpen this. Challenge weak claims, suggest stronger evidence, and rewrite the narrative to be more compelling. Keep it concise. Inves...</a:t>
+            </a:r>
+          </a:p>
+        </p:txBody>
+      </p:sp>
     </p:spTree>
   </p:cSld>
   <p:clrMapOvr>
@@ -6406,6 +6790,70 @@
           </a:p>
         </p:txBody>
       </p:sp>
+      <p:sp>
+        <p:nvSpPr>
+          <p:cNvPr id="4" name="TextBox 3"/>
+          <p:cNvSpPr txBox="1"/>
+          <p:nvPr/>
+        </p:nvSpPr>
+        <p:spPr>
+          <a:xfrm>
+            <a:off x="457200" y="5029200"/>
+            <a:ext cx="8229600" cy="1645920"/>
+          </a:xfrm>
+          <a:prstGeom prst="rect">
+            <a:avLst/>
+          </a:prstGeom>
+          <a:solidFill>
+            <a:srgbClr val="FFF7ED"/>
+          </a:solidFill>
+          <a:ln w="12700">
+            <a:solidFill>
+              <a:srgbClr val="EA580D"/>
+            </a:solidFill>
+          </a:ln>
+        </p:spPr>
+        <p:txBody>
+          <a:bodyPr wrap="square">
+            <a:spAutoFit/>
+          </a:bodyPr>
+          <a:lstStyle/>
+          <a:p>
+            <a:r>
+              <a:rPr sz="800" b="1">
+                <a:solidFill>
+                  <a:srgbClr val="EA580D"/>
+                </a:solidFill>
+              </a:rPr>
+              <a:t>AI COACH PROMPT</a:t>
+            </a:r>
+          </a:p>
+          <a:p>
+            <a:r>
+              <a:rPr sz="700">
+                <a:solidFill>
+                  <a:srgbClr val="64748B"/>
+                </a:solidFill>
+              </a:rPr>
+              <a:t>Copy the text below and paste it into ChatGPT, Claude, or any AI tool:</a:t>
+            </a:r>
+          </a:p>
+          <a:p>
+            <a:r>
+              <a:rPr sz="700" i="1">
+                <a:solidFill>
+                  <a:srgbClr val="0F172A"/>
+                </a:solidFill>
+              </a:rPr>
+              <a:t>I am building [describe your startup]. I am working on the The Solution slide of my pitch deck. Here is my current draft:
+Key Narrative: [paste yours]
+Proof Points: [paste yours]
+So What?: [paste yours]
+Help me sharpen this. Challenge weak claims, suggest stronger evidence, and rewrite the narrative to be more compelling. Keep it concise. Inve...</a:t>
+            </a:r>
+          </a:p>
+        </p:txBody>
+      </p:sp>
     </p:spTree>
   </p:cSld>
   <p:clrMapOvr>
@@ -6641,6 +7089,70 @@
           </a:p>
         </p:txBody>
       </p:sp>
+      <p:sp>
+        <p:nvSpPr>
+          <p:cNvPr id="4" name="TextBox 3"/>
+          <p:cNvSpPr txBox="1"/>
+          <p:nvPr/>
+        </p:nvSpPr>
+        <p:spPr>
+          <a:xfrm>
+            <a:off x="457200" y="5029200"/>
+            <a:ext cx="8229600" cy="1645920"/>
+          </a:xfrm>
+          <a:prstGeom prst="rect">
+            <a:avLst/>
+          </a:prstGeom>
+          <a:solidFill>
+            <a:srgbClr val="FFF7ED"/>
+          </a:solidFill>
+          <a:ln w="12700">
+            <a:solidFill>
+              <a:srgbClr val="EA580D"/>
+            </a:solidFill>
+          </a:ln>
+        </p:spPr>
+        <p:txBody>
+          <a:bodyPr wrap="square">
+            <a:spAutoFit/>
+          </a:bodyPr>
+          <a:lstStyle/>
+          <a:p>
+            <a:r>
+              <a:rPr sz="800" b="1">
+                <a:solidFill>
+                  <a:srgbClr val="EA580D"/>
+                </a:solidFill>
+              </a:rPr>
+              <a:t>AI COACH PROMPT</a:t>
+            </a:r>
+          </a:p>
+          <a:p>
+            <a:r>
+              <a:rPr sz="700">
+                <a:solidFill>
+                  <a:srgbClr val="64748B"/>
+                </a:solidFill>
+              </a:rPr>
+              <a:t>Copy the text below and paste it into ChatGPT, Claude, or any AI tool:</a:t>
+            </a:r>
+          </a:p>
+          <a:p>
+            <a:r>
+              <a:rPr sz="700" i="1">
+                <a:solidFill>
+                  <a:srgbClr val="0F172A"/>
+                </a:solidFill>
+              </a:rPr>
+              <a:t>I am building [describe your startup]. I am working on the The Market slide of my pitch deck. Here is my current draft:
+Key Narrative: [paste yours]
+Proof Points: [paste yours]
+So What?: [paste yours]
+Help me sharpen this. Challenge weak claims, suggest stronger evidence, and rewrite the narrative to be more compelling. Keep it concise. Invest...</a:t>
+            </a:r>
+          </a:p>
+        </p:txBody>
+      </p:sp>
     </p:spTree>
   </p:cSld>
   <p:clrMapOvr>
@@ -6876,6 +7388,70 @@
           </a:p>
         </p:txBody>
       </p:sp>
+      <p:sp>
+        <p:nvSpPr>
+          <p:cNvPr id="4" name="TextBox 3"/>
+          <p:cNvSpPr txBox="1"/>
+          <p:nvPr/>
+        </p:nvSpPr>
+        <p:spPr>
+          <a:xfrm>
+            <a:off x="457200" y="5029200"/>
+            <a:ext cx="8229600" cy="1645920"/>
+          </a:xfrm>
+          <a:prstGeom prst="rect">
+            <a:avLst/>
+          </a:prstGeom>
+          <a:solidFill>
+            <a:srgbClr val="FFF7ED"/>
+          </a:solidFill>
+          <a:ln w="12700">
+            <a:solidFill>
+              <a:srgbClr val="EA580D"/>
+            </a:solidFill>
+          </a:ln>
+        </p:spPr>
+        <p:txBody>
+          <a:bodyPr wrap="square">
+            <a:spAutoFit/>
+          </a:bodyPr>
+          <a:lstStyle/>
+          <a:p>
+            <a:r>
+              <a:rPr sz="800" b="1">
+                <a:solidFill>
+                  <a:srgbClr val="EA580D"/>
+                </a:solidFill>
+              </a:rPr>
+              <a:t>AI COACH PROMPT</a:t>
+            </a:r>
+          </a:p>
+          <a:p>
+            <a:r>
+              <a:rPr sz="700">
+                <a:solidFill>
+                  <a:srgbClr val="64748B"/>
+                </a:solidFill>
+              </a:rPr>
+              <a:t>Copy the text below and paste it into ChatGPT, Claude, or any AI tool:</a:t>
+            </a:r>
+          </a:p>
+          <a:p>
+            <a:r>
+              <a:rPr sz="700" i="1">
+                <a:solidFill>
+                  <a:srgbClr val="0F172A"/>
+                </a:solidFill>
+              </a:rPr>
+              <a:t>I am building [describe your startup]. I am working on the The Product slide of my pitch deck. Here is my current draft:
+Key Narrative: [paste yours]
+Proof Points: [paste yours]
+So What?: [paste yours]
+Help me sharpen this. Challenge weak claims, suggest stronger evidence, and rewrite the narrative to be more compelling. Keep it concise. Inves...</a:t>
+            </a:r>
+          </a:p>
+        </p:txBody>
+      </p:sp>
     </p:spTree>
   </p:cSld>
   <p:clrMapOvr>
@@ -7111,6 +7687,70 @@
           </a:p>
         </p:txBody>
       </p:sp>
+      <p:sp>
+        <p:nvSpPr>
+          <p:cNvPr id="4" name="TextBox 3"/>
+          <p:cNvSpPr txBox="1"/>
+          <p:nvPr/>
+        </p:nvSpPr>
+        <p:spPr>
+          <a:xfrm>
+            <a:off x="457200" y="5029200"/>
+            <a:ext cx="8229600" cy="1645920"/>
+          </a:xfrm>
+          <a:prstGeom prst="rect">
+            <a:avLst/>
+          </a:prstGeom>
+          <a:solidFill>
+            <a:srgbClr val="FFF7ED"/>
+          </a:solidFill>
+          <a:ln w="12700">
+            <a:solidFill>
+              <a:srgbClr val="EA580D"/>
+            </a:solidFill>
+          </a:ln>
+        </p:spPr>
+        <p:txBody>
+          <a:bodyPr wrap="square">
+            <a:spAutoFit/>
+          </a:bodyPr>
+          <a:lstStyle/>
+          <a:p>
+            <a:r>
+              <a:rPr sz="800" b="1">
+                <a:solidFill>
+                  <a:srgbClr val="EA580D"/>
+                </a:solidFill>
+              </a:rPr>
+              <a:t>AI COACH PROMPT</a:t>
+            </a:r>
+          </a:p>
+          <a:p>
+            <a:r>
+              <a:rPr sz="700">
+                <a:solidFill>
+                  <a:srgbClr val="64748B"/>
+                </a:solidFill>
+              </a:rPr>
+              <a:t>Copy the text below and paste it into ChatGPT, Claude, or any AI tool:</a:t>
+            </a:r>
+          </a:p>
+          <a:p>
+            <a:r>
+              <a:rPr sz="700" i="1">
+                <a:solidFill>
+                  <a:srgbClr val="0F172A"/>
+                </a:solidFill>
+              </a:rPr>
+              <a:t>I am building [describe your startup]. I am working on the Business Model slide of my pitch deck. Here is my current draft:
+Key Narrative: [paste yours]
+Proof Points: [paste yours]
+So What?: [paste yours]
+Help me sharpen this. Challenge weak claims, suggest stronger evidence, and rewrite the narrative to be more compelling. Keep it concise. In...</a:t>
+            </a:r>
+          </a:p>
+        </p:txBody>
+      </p:sp>
     </p:spTree>
   </p:cSld>
   <p:clrMapOvr>
@@ -7346,6 +7986,70 @@
           </a:p>
         </p:txBody>
       </p:sp>
+      <p:sp>
+        <p:nvSpPr>
+          <p:cNvPr id="4" name="TextBox 3"/>
+          <p:cNvSpPr txBox="1"/>
+          <p:nvPr/>
+        </p:nvSpPr>
+        <p:spPr>
+          <a:xfrm>
+            <a:off x="457200" y="5029200"/>
+            <a:ext cx="8229600" cy="1645920"/>
+          </a:xfrm>
+          <a:prstGeom prst="rect">
+            <a:avLst/>
+          </a:prstGeom>
+          <a:solidFill>
+            <a:srgbClr val="FFF7ED"/>
+          </a:solidFill>
+          <a:ln w="12700">
+            <a:solidFill>
+              <a:srgbClr val="EA580D"/>
+            </a:solidFill>
+          </a:ln>
+        </p:spPr>
+        <p:txBody>
+          <a:bodyPr wrap="square">
+            <a:spAutoFit/>
+          </a:bodyPr>
+          <a:lstStyle/>
+          <a:p>
+            <a:r>
+              <a:rPr sz="800" b="1">
+                <a:solidFill>
+                  <a:srgbClr val="EA580D"/>
+                </a:solidFill>
+              </a:rPr>
+              <a:t>AI COACH PROMPT</a:t>
+            </a:r>
+          </a:p>
+          <a:p>
+            <a:r>
+              <a:rPr sz="700">
+                <a:solidFill>
+                  <a:srgbClr val="64748B"/>
+                </a:solidFill>
+              </a:rPr>
+              <a:t>Copy the text below and paste it into ChatGPT, Claude, or any AI tool:</a:t>
+            </a:r>
+          </a:p>
+          <a:p>
+            <a:r>
+              <a:rPr sz="700" i="1">
+                <a:solidFill>
+                  <a:srgbClr val="0F172A"/>
+                </a:solidFill>
+              </a:rPr>
+              <a:t>I am building [describe your startup]. I am working on the Traction slide of my pitch deck. Here is my current draft:
+Key Narrative: [paste yours]
+Proof Points: [paste yours]
+So What?: [paste yours]
+Help me sharpen this. Challenge weak claims, suggest stronger evidence, and rewrite the narrative to be more compelling. Keep it concise. Investor...</a:t>
+            </a:r>
+          </a:p>
+        </p:txBody>
+      </p:sp>
     </p:spTree>
   </p:cSld>
   <p:clrMapOvr>
@@ -7577,6 +8281,70 @@
                 <a:latin typeface="Calibri"/>
               </a:rPr>
               <a:t>________________________________________</a:t>
+            </a:r>
+          </a:p>
+        </p:txBody>
+      </p:sp>
+      <p:sp>
+        <p:nvSpPr>
+          <p:cNvPr id="4" name="TextBox 3"/>
+          <p:cNvSpPr txBox="1"/>
+          <p:nvPr/>
+        </p:nvSpPr>
+        <p:spPr>
+          <a:xfrm>
+            <a:off x="457200" y="5029200"/>
+            <a:ext cx="8229600" cy="1645920"/>
+          </a:xfrm>
+          <a:prstGeom prst="rect">
+            <a:avLst/>
+          </a:prstGeom>
+          <a:solidFill>
+            <a:srgbClr val="FFF7ED"/>
+          </a:solidFill>
+          <a:ln w="12700">
+            <a:solidFill>
+              <a:srgbClr val="EA580D"/>
+            </a:solidFill>
+          </a:ln>
+        </p:spPr>
+        <p:txBody>
+          <a:bodyPr wrap="square">
+            <a:spAutoFit/>
+          </a:bodyPr>
+          <a:lstStyle/>
+          <a:p>
+            <a:r>
+              <a:rPr sz="800" b="1">
+                <a:solidFill>
+                  <a:srgbClr val="EA580D"/>
+                </a:solidFill>
+              </a:rPr>
+              <a:t>AI COACH PROMPT</a:t>
+            </a:r>
+          </a:p>
+          <a:p>
+            <a:r>
+              <a:rPr sz="700">
+                <a:solidFill>
+                  <a:srgbClr val="64748B"/>
+                </a:solidFill>
+              </a:rPr>
+              <a:t>Copy the text below and paste it into ChatGPT, Claude, or any AI tool:</a:t>
+            </a:r>
+          </a:p>
+          <a:p>
+            <a:r>
+              <a:rPr sz="700" i="1">
+                <a:solidFill>
+                  <a:srgbClr val="0F172A"/>
+                </a:solidFill>
+              </a:rPr>
+              <a:t>I am building [describe your startup]. I am working on the The Team slide of my pitch deck. Here is my current draft:
+Key Narrative: [paste yours]
+Proof Points: [paste yours]
+So What?: [paste yours]
+Help me sharpen this. Challenge weak claims, suggest stronger evidence, and rewrite the narrative to be more compelling. Keep it concise. Investor...</a:t>
             </a:r>
           </a:p>
         </p:txBody>

--- a/low-tech/deck-building.pptx
+++ b/low-tech/deck-building.pptx
@@ -4677,6 +4677,39 @@
           </a:p>
         </p:txBody>
       </p:sp>
+      <p:sp>
+        <p:nvSpPr>
+          <p:cNvPr id="3" name="TextBox 2"/>
+          <p:cNvSpPr txBox="1"/>
+          <p:nvPr/>
+        </p:nvSpPr>
+        <p:spPr>
+          <a:xfrm>
+            <a:off x="457200" y="5760720"/>
+            <a:ext cx="8229600" cy="457200"/>
+          </a:xfrm>
+          <a:prstGeom prst="rect">
+            <a:avLst/>
+          </a:prstGeom>
+          <a:noFill/>
+        </p:spPr>
+        <p:txBody>
+          <a:bodyPr wrap="square">
+            <a:spAutoFit/>
+          </a:bodyPr>
+          <a:lstStyle/>
+          <a:p>
+            <a:r>
+              <a:rPr sz="900" b="0">
+                <a:solidFill>
+                  <a:srgbClr val="EA580D"/>
+                </a:solidFill>
+              </a:rPr>
+              <a:t>Want AI coaching? Open AI-PROMPTS.md, copy the prompt for this exercise, and paste it into ChatGPT or Claude.</a:t>
+            </a:r>
+          </a:p>
+        </p:txBody>
+      </p:sp>
     </p:spTree>
   </p:cSld>
   <p:clrMapOvr>
@@ -4912,70 +4945,6 @@
           </a:p>
         </p:txBody>
       </p:sp>
-      <p:sp>
-        <p:nvSpPr>
-          <p:cNvPr id="4" name="TextBox 3"/>
-          <p:cNvSpPr txBox="1"/>
-          <p:nvPr/>
-        </p:nvSpPr>
-        <p:spPr>
-          <a:xfrm>
-            <a:off x="457200" y="5029200"/>
-            <a:ext cx="8229600" cy="1645920"/>
-          </a:xfrm>
-          <a:prstGeom prst="rect">
-            <a:avLst/>
-          </a:prstGeom>
-          <a:solidFill>
-            <a:srgbClr val="FFF7ED"/>
-          </a:solidFill>
-          <a:ln w="12700">
-            <a:solidFill>
-              <a:srgbClr val="EA580D"/>
-            </a:solidFill>
-          </a:ln>
-        </p:spPr>
-        <p:txBody>
-          <a:bodyPr wrap="square">
-            <a:spAutoFit/>
-          </a:bodyPr>
-          <a:lstStyle/>
-          <a:p>
-            <a:r>
-              <a:rPr sz="800" b="1">
-                <a:solidFill>
-                  <a:srgbClr val="EA580D"/>
-                </a:solidFill>
-              </a:rPr>
-              <a:t>AI COACH PROMPT</a:t>
-            </a:r>
-          </a:p>
-          <a:p>
-            <a:r>
-              <a:rPr sz="700">
-                <a:solidFill>
-                  <a:srgbClr val="64748B"/>
-                </a:solidFill>
-              </a:rPr>
-              <a:t>Copy the text below and paste it into ChatGPT, Claude, or any AI tool:</a:t>
-            </a:r>
-          </a:p>
-          <a:p>
-            <a:r>
-              <a:rPr sz="700" i="1">
-                <a:solidFill>
-                  <a:srgbClr val="0F172A"/>
-                </a:solidFill>
-              </a:rPr>
-              <a:t>I am building [describe your startup]. I am working on the The Vision slide of my pitch deck. Here is my current draft:
-Key Narrative: [paste yours]
-Proof Points: [paste yours]
-So What?: [paste yours]
-Help me sharpen this. Challenge weak claims, suggest stronger evidence, and rewrite the narrative to be more compelling. Keep it concise. Invest...</a:t>
-            </a:r>
-          </a:p>
-        </p:txBody>
-      </p:sp>
     </p:spTree>
   </p:cSld>
   <p:clrMapOvr>
@@ -5211,70 +5180,6 @@
           </a:p>
         </p:txBody>
       </p:sp>
-      <p:sp>
-        <p:nvSpPr>
-          <p:cNvPr id="4" name="TextBox 3"/>
-          <p:cNvSpPr txBox="1"/>
-          <p:nvPr/>
-        </p:nvSpPr>
-        <p:spPr>
-          <a:xfrm>
-            <a:off x="457200" y="5029200"/>
-            <a:ext cx="8229600" cy="1645920"/>
-          </a:xfrm>
-          <a:prstGeom prst="rect">
-            <a:avLst/>
-          </a:prstGeom>
-          <a:solidFill>
-            <a:srgbClr val="FFF7ED"/>
-          </a:solidFill>
-          <a:ln w="12700">
-            <a:solidFill>
-              <a:srgbClr val="EA580D"/>
-            </a:solidFill>
-          </a:ln>
-        </p:spPr>
-        <p:txBody>
-          <a:bodyPr wrap="square">
-            <a:spAutoFit/>
-          </a:bodyPr>
-          <a:lstStyle/>
-          <a:p>
-            <a:r>
-              <a:rPr sz="800" b="1">
-                <a:solidFill>
-                  <a:srgbClr val="EA580D"/>
-                </a:solidFill>
-              </a:rPr>
-              <a:t>AI COACH PROMPT</a:t>
-            </a:r>
-          </a:p>
-          <a:p>
-            <a:r>
-              <a:rPr sz="700">
-                <a:solidFill>
-                  <a:srgbClr val="64748B"/>
-                </a:solidFill>
-              </a:rPr>
-              <a:t>Copy the text below and paste it into ChatGPT, Claude, or any AI tool:</a:t>
-            </a:r>
-          </a:p>
-          <a:p>
-            <a:r>
-              <a:rPr sz="700" i="1">
-                <a:solidFill>
-                  <a:srgbClr val="0F172A"/>
-                </a:solidFill>
-              </a:rPr>
-              <a:t>I am building [describe your startup]. I am working on the The Ask slide of my pitch deck. Here is my current draft:
-Key Narrative: [paste yours]
-Proof Points: [paste yours]
-So What?: [paste yours]
-Help me sharpen this. Challenge weak claims, suggest stronger evidence, and rewrite the narrative to be more compelling. Keep it concise. Investors...</a:t>
-            </a:r>
-          </a:p>
-        </p:txBody>
-      </p:sp>
     </p:spTree>
   </p:cSld>
   <p:clrMapOvr>
@@ -5489,70 +5394,6 @@
           </a:p>
         </p:txBody>
       </p:sp>
-      <p:sp>
-        <p:nvSpPr>
-          <p:cNvPr id="4" name="TextBox 3"/>
-          <p:cNvSpPr txBox="1"/>
-          <p:nvPr/>
-        </p:nvSpPr>
-        <p:spPr>
-          <a:xfrm>
-            <a:off x="457200" y="5029200"/>
-            <a:ext cx="8229600" cy="1645920"/>
-          </a:xfrm>
-          <a:prstGeom prst="rect">
-            <a:avLst/>
-          </a:prstGeom>
-          <a:solidFill>
-            <a:srgbClr val="FFF7ED"/>
-          </a:solidFill>
-          <a:ln w="12700">
-            <a:solidFill>
-              <a:srgbClr val="EA580D"/>
-            </a:solidFill>
-          </a:ln>
-        </p:spPr>
-        <p:txBody>
-          <a:bodyPr wrap="square">
-            <a:spAutoFit/>
-          </a:bodyPr>
-          <a:lstStyle/>
-          <a:p>
-            <a:r>
-              <a:rPr sz="800" b="1">
-                <a:solidFill>
-                  <a:srgbClr val="EA580D"/>
-                </a:solidFill>
-              </a:rPr>
-              <a:t>AI COACH PROMPT</a:t>
-            </a:r>
-          </a:p>
-          <a:p>
-            <a:r>
-              <a:rPr sz="700">
-                <a:solidFill>
-                  <a:srgbClr val="64748B"/>
-                </a:solidFill>
-              </a:rPr>
-              <a:t>Copy the text below and paste it into ChatGPT, Claude, or any AI tool:</a:t>
-            </a:r>
-          </a:p>
-          <a:p>
-            <a:r>
-              <a:rPr sz="700" i="1">
-                <a:solidFill>
-                  <a:srgbClr val="0F172A"/>
-                </a:solidFill>
-              </a:rPr>
-              <a:t>I am building [describe your startup]. I am working on the deck versions slide of my pitch deck. Here is my current draft:
-Key Narrative: [paste yours]
-Proof Points: [paste yours]
-So What?: [paste yours]
-Help me sharpen this. Challenge weak claims, suggest stronger evidence, and rewrite the narrative to be more compelling. Keep it concise. Inv...</a:t>
-            </a:r>
-          </a:p>
-        </p:txBody>
-      </p:sp>
     </p:spTree>
   </p:cSld>
   <p:clrMapOvr>
@@ -5893,70 +5734,6 @@
           </a:p>
         </p:txBody>
       </p:sp>
-      <p:sp>
-        <p:nvSpPr>
-          <p:cNvPr id="4" name="TextBox 3"/>
-          <p:cNvSpPr txBox="1"/>
-          <p:nvPr/>
-        </p:nvSpPr>
-        <p:spPr>
-          <a:xfrm>
-            <a:off x="457200" y="5029200"/>
-            <a:ext cx="8229600" cy="1645920"/>
-          </a:xfrm>
-          <a:prstGeom prst="rect">
-            <a:avLst/>
-          </a:prstGeom>
-          <a:solidFill>
-            <a:srgbClr val="FFF7ED"/>
-          </a:solidFill>
-          <a:ln w="12700">
-            <a:solidFill>
-              <a:srgbClr val="EA580D"/>
-            </a:solidFill>
-          </a:ln>
-        </p:spPr>
-        <p:txBody>
-          <a:bodyPr wrap="square">
-            <a:spAutoFit/>
-          </a:bodyPr>
-          <a:lstStyle/>
-          <a:p>
-            <a:r>
-              <a:rPr sz="800" b="1">
-                <a:solidFill>
-                  <a:srgbClr val="EA580D"/>
-                </a:solidFill>
-              </a:rPr>
-              <a:t>AI COACH PROMPT</a:t>
-            </a:r>
-          </a:p>
-          <a:p>
-            <a:r>
-              <a:rPr sz="700">
-                <a:solidFill>
-                  <a:srgbClr val="64748B"/>
-                </a:solidFill>
-              </a:rPr>
-              <a:t>Copy the text below and paste it into ChatGPT, Claude, or any AI tool:</a:t>
-            </a:r>
-          </a:p>
-          <a:p>
-            <a:r>
-              <a:rPr sz="700" i="1">
-                <a:solidFill>
-                  <a:srgbClr val="0F172A"/>
-                </a:solidFill>
-              </a:rPr>
-              <a:t>I am building [describe your startup]. I am working on the forwardable email slide of my pitch deck. Here is my current draft:
-Key Narrative: [paste yours]
-Proof Points: [paste yours]
-So What?: [paste yours]
-Help me sharpen this. Challenge weak claims, suggest stronger evidence, and rewrite the narrative to be more compelling. Keep it concise....</a:t>
-            </a:r>
-          </a:p>
-        </p:txBody>
-      </p:sp>
     </p:spTree>
   </p:cSld>
   <p:clrMapOvr>
@@ -6192,70 +5969,6 @@
           </a:p>
         </p:txBody>
       </p:sp>
-      <p:sp>
-        <p:nvSpPr>
-          <p:cNvPr id="4" name="TextBox 3"/>
-          <p:cNvSpPr txBox="1"/>
-          <p:nvPr/>
-        </p:nvSpPr>
-        <p:spPr>
-          <a:xfrm>
-            <a:off x="457200" y="5029200"/>
-            <a:ext cx="8229600" cy="1645920"/>
-          </a:xfrm>
-          <a:prstGeom prst="rect">
-            <a:avLst/>
-          </a:prstGeom>
-          <a:solidFill>
-            <a:srgbClr val="FFF7ED"/>
-          </a:solidFill>
-          <a:ln w="12700">
-            <a:solidFill>
-              <a:srgbClr val="EA580D"/>
-            </a:solidFill>
-          </a:ln>
-        </p:spPr>
-        <p:txBody>
-          <a:bodyPr wrap="square">
-            <a:spAutoFit/>
-          </a:bodyPr>
-          <a:lstStyle/>
-          <a:p>
-            <a:r>
-              <a:rPr sz="800" b="1">
-                <a:solidFill>
-                  <a:srgbClr val="EA580D"/>
-                </a:solidFill>
-              </a:rPr>
-              <a:t>AI COACH PROMPT</a:t>
-            </a:r>
-          </a:p>
-          <a:p>
-            <a:r>
-              <a:rPr sz="700">
-                <a:solidFill>
-                  <a:srgbClr val="64748B"/>
-                </a:solidFill>
-              </a:rPr>
-              <a:t>Copy the text below and paste it into ChatGPT, Claude, or any AI tool:</a:t>
-            </a:r>
-          </a:p>
-          <a:p>
-            <a:r>
-              <a:rPr sz="700" i="1">
-                <a:solidFill>
-                  <a:srgbClr val="0F172A"/>
-                </a:solidFill>
-              </a:rPr>
-              <a:t>I am building [describe your startup]. I am working on the The Hook slide of my pitch deck. Here is my current draft:
-Key Narrative: [paste yours]
-Proof Points: [paste yours]
-So What?: [paste yours]
-Help me sharpen this. Challenge weak claims, suggest stronger evidence, and rewrite the narrative to be more compelling. Keep it concise. Investor...</a:t>
-            </a:r>
-          </a:p>
-        </p:txBody>
-      </p:sp>
     </p:spTree>
   </p:cSld>
   <p:clrMapOvr>
@@ -6491,70 +6204,6 @@
           </a:p>
         </p:txBody>
       </p:sp>
-      <p:sp>
-        <p:nvSpPr>
-          <p:cNvPr id="4" name="TextBox 3"/>
-          <p:cNvSpPr txBox="1"/>
-          <p:nvPr/>
-        </p:nvSpPr>
-        <p:spPr>
-          <a:xfrm>
-            <a:off x="457200" y="5029200"/>
-            <a:ext cx="8229600" cy="1645920"/>
-          </a:xfrm>
-          <a:prstGeom prst="rect">
-            <a:avLst/>
-          </a:prstGeom>
-          <a:solidFill>
-            <a:srgbClr val="FFF7ED"/>
-          </a:solidFill>
-          <a:ln w="12700">
-            <a:solidFill>
-              <a:srgbClr val="EA580D"/>
-            </a:solidFill>
-          </a:ln>
-        </p:spPr>
-        <p:txBody>
-          <a:bodyPr wrap="square">
-            <a:spAutoFit/>
-          </a:bodyPr>
-          <a:lstStyle/>
-          <a:p>
-            <a:r>
-              <a:rPr sz="800" b="1">
-                <a:solidFill>
-                  <a:srgbClr val="EA580D"/>
-                </a:solidFill>
-              </a:rPr>
-              <a:t>AI COACH PROMPT</a:t>
-            </a:r>
-          </a:p>
-          <a:p>
-            <a:r>
-              <a:rPr sz="700">
-                <a:solidFill>
-                  <a:srgbClr val="64748B"/>
-                </a:solidFill>
-              </a:rPr>
-              <a:t>Copy the text below and paste it into ChatGPT, Claude, or any AI tool:</a:t>
-            </a:r>
-          </a:p>
-          <a:p>
-            <a:r>
-              <a:rPr sz="700" i="1">
-                <a:solidFill>
-                  <a:srgbClr val="0F172A"/>
-                </a:solidFill>
-              </a:rPr>
-              <a:t>I am building [describe your startup]. I am working on the The Problem slide of my pitch deck. Here is my current draft:
-Key Narrative: [paste yours]
-Proof Points: [paste yours]
-So What?: [paste yours]
-Help me sharpen this. Challenge weak claims, suggest stronger evidence, and rewrite the narrative to be more compelling. Keep it concise. Inves...</a:t>
-            </a:r>
-          </a:p>
-        </p:txBody>
-      </p:sp>
     </p:spTree>
   </p:cSld>
   <p:clrMapOvr>
@@ -6790,70 +6439,6 @@
           </a:p>
         </p:txBody>
       </p:sp>
-      <p:sp>
-        <p:nvSpPr>
-          <p:cNvPr id="4" name="TextBox 3"/>
-          <p:cNvSpPr txBox="1"/>
-          <p:nvPr/>
-        </p:nvSpPr>
-        <p:spPr>
-          <a:xfrm>
-            <a:off x="457200" y="5029200"/>
-            <a:ext cx="8229600" cy="1645920"/>
-          </a:xfrm>
-          <a:prstGeom prst="rect">
-            <a:avLst/>
-          </a:prstGeom>
-          <a:solidFill>
-            <a:srgbClr val="FFF7ED"/>
-          </a:solidFill>
-          <a:ln w="12700">
-            <a:solidFill>
-              <a:srgbClr val="EA580D"/>
-            </a:solidFill>
-          </a:ln>
-        </p:spPr>
-        <p:txBody>
-          <a:bodyPr wrap="square">
-            <a:spAutoFit/>
-          </a:bodyPr>
-          <a:lstStyle/>
-          <a:p>
-            <a:r>
-              <a:rPr sz="800" b="1">
-                <a:solidFill>
-                  <a:srgbClr val="EA580D"/>
-                </a:solidFill>
-              </a:rPr>
-              <a:t>AI COACH PROMPT</a:t>
-            </a:r>
-          </a:p>
-          <a:p>
-            <a:r>
-              <a:rPr sz="700">
-                <a:solidFill>
-                  <a:srgbClr val="64748B"/>
-                </a:solidFill>
-              </a:rPr>
-              <a:t>Copy the text below and paste it into ChatGPT, Claude, or any AI tool:</a:t>
-            </a:r>
-          </a:p>
-          <a:p>
-            <a:r>
-              <a:rPr sz="700" i="1">
-                <a:solidFill>
-                  <a:srgbClr val="0F172A"/>
-                </a:solidFill>
-              </a:rPr>
-              <a:t>I am building [describe your startup]. I am working on the The Solution slide of my pitch deck. Here is my current draft:
-Key Narrative: [paste yours]
-Proof Points: [paste yours]
-So What?: [paste yours]
-Help me sharpen this. Challenge weak claims, suggest stronger evidence, and rewrite the narrative to be more compelling. Keep it concise. Inve...</a:t>
-            </a:r>
-          </a:p>
-        </p:txBody>
-      </p:sp>
     </p:spTree>
   </p:cSld>
   <p:clrMapOvr>
@@ -7089,70 +6674,6 @@
           </a:p>
         </p:txBody>
       </p:sp>
-      <p:sp>
-        <p:nvSpPr>
-          <p:cNvPr id="4" name="TextBox 3"/>
-          <p:cNvSpPr txBox="1"/>
-          <p:nvPr/>
-        </p:nvSpPr>
-        <p:spPr>
-          <a:xfrm>
-            <a:off x="457200" y="5029200"/>
-            <a:ext cx="8229600" cy="1645920"/>
-          </a:xfrm>
-          <a:prstGeom prst="rect">
-            <a:avLst/>
-          </a:prstGeom>
-          <a:solidFill>
-            <a:srgbClr val="FFF7ED"/>
-          </a:solidFill>
-          <a:ln w="12700">
-            <a:solidFill>
-              <a:srgbClr val="EA580D"/>
-            </a:solidFill>
-          </a:ln>
-        </p:spPr>
-        <p:txBody>
-          <a:bodyPr wrap="square">
-            <a:spAutoFit/>
-          </a:bodyPr>
-          <a:lstStyle/>
-          <a:p>
-            <a:r>
-              <a:rPr sz="800" b="1">
-                <a:solidFill>
-                  <a:srgbClr val="EA580D"/>
-                </a:solidFill>
-              </a:rPr>
-              <a:t>AI COACH PROMPT</a:t>
-            </a:r>
-          </a:p>
-          <a:p>
-            <a:r>
-              <a:rPr sz="700">
-                <a:solidFill>
-                  <a:srgbClr val="64748B"/>
-                </a:solidFill>
-              </a:rPr>
-              <a:t>Copy the text below and paste it into ChatGPT, Claude, or any AI tool:</a:t>
-            </a:r>
-          </a:p>
-          <a:p>
-            <a:r>
-              <a:rPr sz="700" i="1">
-                <a:solidFill>
-                  <a:srgbClr val="0F172A"/>
-                </a:solidFill>
-              </a:rPr>
-              <a:t>I am building [describe your startup]. I am working on the The Market slide of my pitch deck. Here is my current draft:
-Key Narrative: [paste yours]
-Proof Points: [paste yours]
-So What?: [paste yours]
-Help me sharpen this. Challenge weak claims, suggest stronger evidence, and rewrite the narrative to be more compelling. Keep it concise. Invest...</a:t>
-            </a:r>
-          </a:p>
-        </p:txBody>
-      </p:sp>
     </p:spTree>
   </p:cSld>
   <p:clrMapOvr>
@@ -7388,70 +6909,6 @@
           </a:p>
         </p:txBody>
       </p:sp>
-      <p:sp>
-        <p:nvSpPr>
-          <p:cNvPr id="4" name="TextBox 3"/>
-          <p:cNvSpPr txBox="1"/>
-          <p:nvPr/>
-        </p:nvSpPr>
-        <p:spPr>
-          <a:xfrm>
-            <a:off x="457200" y="5029200"/>
-            <a:ext cx="8229600" cy="1645920"/>
-          </a:xfrm>
-          <a:prstGeom prst="rect">
-            <a:avLst/>
-          </a:prstGeom>
-          <a:solidFill>
-            <a:srgbClr val="FFF7ED"/>
-          </a:solidFill>
-          <a:ln w="12700">
-            <a:solidFill>
-              <a:srgbClr val="EA580D"/>
-            </a:solidFill>
-          </a:ln>
-        </p:spPr>
-        <p:txBody>
-          <a:bodyPr wrap="square">
-            <a:spAutoFit/>
-          </a:bodyPr>
-          <a:lstStyle/>
-          <a:p>
-            <a:r>
-              <a:rPr sz="800" b="1">
-                <a:solidFill>
-                  <a:srgbClr val="EA580D"/>
-                </a:solidFill>
-              </a:rPr>
-              <a:t>AI COACH PROMPT</a:t>
-            </a:r>
-          </a:p>
-          <a:p>
-            <a:r>
-              <a:rPr sz="700">
-                <a:solidFill>
-                  <a:srgbClr val="64748B"/>
-                </a:solidFill>
-              </a:rPr>
-              <a:t>Copy the text below and paste it into ChatGPT, Claude, or any AI tool:</a:t>
-            </a:r>
-          </a:p>
-          <a:p>
-            <a:r>
-              <a:rPr sz="700" i="1">
-                <a:solidFill>
-                  <a:srgbClr val="0F172A"/>
-                </a:solidFill>
-              </a:rPr>
-              <a:t>I am building [describe your startup]. I am working on the The Product slide of my pitch deck. Here is my current draft:
-Key Narrative: [paste yours]
-Proof Points: [paste yours]
-So What?: [paste yours]
-Help me sharpen this. Challenge weak claims, suggest stronger evidence, and rewrite the narrative to be more compelling. Keep it concise. Inves...</a:t>
-            </a:r>
-          </a:p>
-        </p:txBody>
-      </p:sp>
     </p:spTree>
   </p:cSld>
   <p:clrMapOvr>
@@ -7687,70 +7144,6 @@
           </a:p>
         </p:txBody>
       </p:sp>
-      <p:sp>
-        <p:nvSpPr>
-          <p:cNvPr id="4" name="TextBox 3"/>
-          <p:cNvSpPr txBox="1"/>
-          <p:nvPr/>
-        </p:nvSpPr>
-        <p:spPr>
-          <a:xfrm>
-            <a:off x="457200" y="5029200"/>
-            <a:ext cx="8229600" cy="1645920"/>
-          </a:xfrm>
-          <a:prstGeom prst="rect">
-            <a:avLst/>
-          </a:prstGeom>
-          <a:solidFill>
-            <a:srgbClr val="FFF7ED"/>
-          </a:solidFill>
-          <a:ln w="12700">
-            <a:solidFill>
-              <a:srgbClr val="EA580D"/>
-            </a:solidFill>
-          </a:ln>
-        </p:spPr>
-        <p:txBody>
-          <a:bodyPr wrap="square">
-            <a:spAutoFit/>
-          </a:bodyPr>
-          <a:lstStyle/>
-          <a:p>
-            <a:r>
-              <a:rPr sz="800" b="1">
-                <a:solidFill>
-                  <a:srgbClr val="EA580D"/>
-                </a:solidFill>
-              </a:rPr>
-              <a:t>AI COACH PROMPT</a:t>
-            </a:r>
-          </a:p>
-          <a:p>
-            <a:r>
-              <a:rPr sz="700">
-                <a:solidFill>
-                  <a:srgbClr val="64748B"/>
-                </a:solidFill>
-              </a:rPr>
-              <a:t>Copy the text below and paste it into ChatGPT, Claude, or any AI tool:</a:t>
-            </a:r>
-          </a:p>
-          <a:p>
-            <a:r>
-              <a:rPr sz="700" i="1">
-                <a:solidFill>
-                  <a:srgbClr val="0F172A"/>
-                </a:solidFill>
-              </a:rPr>
-              <a:t>I am building [describe your startup]. I am working on the Business Model slide of my pitch deck. Here is my current draft:
-Key Narrative: [paste yours]
-Proof Points: [paste yours]
-So What?: [paste yours]
-Help me sharpen this. Challenge weak claims, suggest stronger evidence, and rewrite the narrative to be more compelling. Keep it concise. In...</a:t>
-            </a:r>
-          </a:p>
-        </p:txBody>
-      </p:sp>
     </p:spTree>
   </p:cSld>
   <p:clrMapOvr>
@@ -7986,70 +7379,6 @@
           </a:p>
         </p:txBody>
       </p:sp>
-      <p:sp>
-        <p:nvSpPr>
-          <p:cNvPr id="4" name="TextBox 3"/>
-          <p:cNvSpPr txBox="1"/>
-          <p:nvPr/>
-        </p:nvSpPr>
-        <p:spPr>
-          <a:xfrm>
-            <a:off x="457200" y="5029200"/>
-            <a:ext cx="8229600" cy="1645920"/>
-          </a:xfrm>
-          <a:prstGeom prst="rect">
-            <a:avLst/>
-          </a:prstGeom>
-          <a:solidFill>
-            <a:srgbClr val="FFF7ED"/>
-          </a:solidFill>
-          <a:ln w="12700">
-            <a:solidFill>
-              <a:srgbClr val="EA580D"/>
-            </a:solidFill>
-          </a:ln>
-        </p:spPr>
-        <p:txBody>
-          <a:bodyPr wrap="square">
-            <a:spAutoFit/>
-          </a:bodyPr>
-          <a:lstStyle/>
-          <a:p>
-            <a:r>
-              <a:rPr sz="800" b="1">
-                <a:solidFill>
-                  <a:srgbClr val="EA580D"/>
-                </a:solidFill>
-              </a:rPr>
-              <a:t>AI COACH PROMPT</a:t>
-            </a:r>
-          </a:p>
-          <a:p>
-            <a:r>
-              <a:rPr sz="700">
-                <a:solidFill>
-                  <a:srgbClr val="64748B"/>
-                </a:solidFill>
-              </a:rPr>
-              <a:t>Copy the text below and paste it into ChatGPT, Claude, or any AI tool:</a:t>
-            </a:r>
-          </a:p>
-          <a:p>
-            <a:r>
-              <a:rPr sz="700" i="1">
-                <a:solidFill>
-                  <a:srgbClr val="0F172A"/>
-                </a:solidFill>
-              </a:rPr>
-              <a:t>I am building [describe your startup]. I am working on the Traction slide of my pitch deck. Here is my current draft:
-Key Narrative: [paste yours]
-Proof Points: [paste yours]
-So What?: [paste yours]
-Help me sharpen this. Challenge weak claims, suggest stronger evidence, and rewrite the narrative to be more compelling. Keep it concise. Investor...</a:t>
-            </a:r>
-          </a:p>
-        </p:txBody>
-      </p:sp>
     </p:spTree>
   </p:cSld>
   <p:clrMapOvr>
@@ -8281,70 +7610,6 @@
                 <a:latin typeface="Calibri"/>
               </a:rPr>
               <a:t>________________________________________</a:t>
-            </a:r>
-          </a:p>
-        </p:txBody>
-      </p:sp>
-      <p:sp>
-        <p:nvSpPr>
-          <p:cNvPr id="4" name="TextBox 3"/>
-          <p:cNvSpPr txBox="1"/>
-          <p:nvPr/>
-        </p:nvSpPr>
-        <p:spPr>
-          <a:xfrm>
-            <a:off x="457200" y="5029200"/>
-            <a:ext cx="8229600" cy="1645920"/>
-          </a:xfrm>
-          <a:prstGeom prst="rect">
-            <a:avLst/>
-          </a:prstGeom>
-          <a:solidFill>
-            <a:srgbClr val="FFF7ED"/>
-          </a:solidFill>
-          <a:ln w="12700">
-            <a:solidFill>
-              <a:srgbClr val="EA580D"/>
-            </a:solidFill>
-          </a:ln>
-        </p:spPr>
-        <p:txBody>
-          <a:bodyPr wrap="square">
-            <a:spAutoFit/>
-          </a:bodyPr>
-          <a:lstStyle/>
-          <a:p>
-            <a:r>
-              <a:rPr sz="800" b="1">
-                <a:solidFill>
-                  <a:srgbClr val="EA580D"/>
-                </a:solidFill>
-              </a:rPr>
-              <a:t>AI COACH PROMPT</a:t>
-            </a:r>
-          </a:p>
-          <a:p>
-            <a:r>
-              <a:rPr sz="700">
-                <a:solidFill>
-                  <a:srgbClr val="64748B"/>
-                </a:solidFill>
-              </a:rPr>
-              <a:t>Copy the text below and paste it into ChatGPT, Claude, or any AI tool:</a:t>
-            </a:r>
-          </a:p>
-          <a:p>
-            <a:r>
-              <a:rPr sz="700" i="1">
-                <a:solidFill>
-                  <a:srgbClr val="0F172A"/>
-                </a:solidFill>
-              </a:rPr>
-              <a:t>I am building [describe your startup]. I am working on the The Team slide of my pitch deck. Here is my current draft:
-Key Narrative: [paste yours]
-Proof Points: [paste yours]
-So What?: [paste yours]
-Help me sharpen this. Challenge weak claims, suggest stronger evidence, and rewrite the narrative to be more compelling. Keep it concise. Investor...</a:t>
             </a:r>
           </a:p>
         </p:txBody>
